--- a/stage3_neural_networks/04_hyperparameter_tuning/Lecture-13-Hyperparameter-Tuning.pptx
+++ b/stage3_neural_networks/04_hyperparameter_tuning/Lecture-13-Hyperparameter-Tuning.pptx
@@ -8308,6 +8308,9 @@
           <a:lstStyle/>
           <a:p>
             <a:r>
+              <a:rPr>
+                <a:latin typeface="Calibri"/>
+              </a:rPr>
               <a:t>AI Basic Training</a:t>
             </a:r>
           </a:p>
@@ -8329,6 +8332,9 @@
           <a:lstStyle/>
           <a:p>
             <a:r>
+              <a:rPr>
+                <a:latin typeface="Calibri"/>
+              </a:rPr>
               <a:t>Lesson 3.4  |  Stage 3: Neural Networks</a:t>
             </a:r>
           </a:p>
@@ -8350,6 +8356,9 @@
           <a:lstStyle/>
           <a:p>
             <a:r>
+              <a:rPr b="1">
+                <a:latin typeface="Calibri"/>
+              </a:rPr>
               <a:t>Hyperparameter Tuning</a:t>
             </a:r>
           </a:p>
@@ -8371,6 +8380,9 @@
           <a:lstStyle/>
           <a:p>
             <a:r>
+              <a:rPr>
+                <a:latin typeface="Calibri"/>
+              </a:rPr>
               <a:t>The Knobs You Turn  -  Systematic Optimisation</a:t>
             </a:r>
           </a:p>
@@ -8410,11 +8422,17 @@
           <a:lstStyle/>
           <a:p>
             <a:r>
+              <a:rPr b="1">
+                <a:latin typeface="Calibri"/>
+              </a:rPr>
               <a:t>Search</a:t>
             </a:r>
           </a:p>
           <a:p>
             <a:r>
+              <a:rPr b="1">
+                <a:latin typeface="Calibri"/>
+              </a:rPr>
               <a:t>Strategies</a:t>
             </a:r>
           </a:p>
@@ -8436,6 +8454,9 @@
           <a:lstStyle/>
           <a:p>
             <a:r>
+              <a:rPr b="1">
+                <a:latin typeface="Calibri"/>
+              </a:rPr>
               <a:t>04</a:t>
             </a:r>
           </a:p>
@@ -8475,6 +8496,9 @@
           <a:lstStyle/>
           <a:p>
             <a:r>
+              <a:rPr b="1">
+                <a:latin typeface="Calibri"/>
+              </a:rPr>
               <a:t>Three Approaches to Hyperparameter Search</a:t>
             </a:r>
           </a:p>
@@ -8538,11 +8562,17 @@
           <a:lstStyle/>
           <a:p>
             <a:r>
+              <a:rPr b="1">
+                <a:latin typeface="Calibri"/>
+              </a:rPr>
               <a:t>Workshop</a:t>
             </a:r>
           </a:p>
           <a:p>
             <a:r>
+              <a:rPr b="1">
+                <a:latin typeface="Calibri"/>
+              </a:rPr>
               <a:t>and Next Steps</a:t>
             </a:r>
           </a:p>
@@ -8564,6 +8594,9 @@
           <a:lstStyle/>
           <a:p>
             <a:r>
+              <a:rPr b="1">
+                <a:latin typeface="Calibri"/>
+              </a:rPr>
               <a:t>05</a:t>
             </a:r>
           </a:p>
@@ -8603,6 +8636,9 @@
           <a:lstStyle/>
           <a:p>
             <a:r>
+              <a:rPr b="1">
+                <a:latin typeface="Calibri"/>
+              </a:rPr>
               <a:t>Workshop: 4 Hands-On Exercises</a:t>
             </a:r>
           </a:p>
@@ -8624,37 +8660,49 @@
           <a:lstStyle/>
           <a:p>
             <a:r>
-              <a:rPr sz="1600"/>
+              <a:rPr sz="1600">
+                <a:latin typeface="Calibri"/>
+              </a:rPr>
               <a:t>Exercise 1:  Parameters vs hyperparameters - inspect weights before/after</a:t>
             </a:r>
           </a:p>
           <a:p>
             <a:r>
-              <a:rPr sz="1600"/>
+              <a:rPr sz="1600">
+                <a:latin typeface="Calibri"/>
+              </a:rPr>
               <a:t>Exercise 2:  Learning rate sensitivity - compare 0.001 vs 0.01 vs 0.1</a:t>
             </a:r>
           </a:p>
           <a:p>
             <a:r>
-              <a:rPr sz="1600"/>
+              <a:rPr sz="1600">
+                <a:latin typeface="Calibri"/>
+              </a:rPr>
               <a:t>Exercise 3:  Batch size effects - 32 vs 256 vs 1024</a:t>
             </a:r>
           </a:p>
           <a:p>
             <a:r>
-              <a:rPr sz="1600"/>
+              <a:rPr sz="1600">
+                <a:latin typeface="Calibri"/>
+              </a:rPr>
               <a:t>Exercise 4:  Architecture search - grid over units x layers, store results</a:t>
             </a:r>
           </a:p>
           <a:p>
             <a:r>
-              <a:rPr sz="1600"/>
+              <a:rPr sz="1600">
+                <a:latin typeface="Calibri"/>
+              </a:rPr>
               <a:t/>
             </a:r>
           </a:p>
           <a:p>
             <a:r>
-              <a:rPr sz="1600"/>
+              <a:rPr sz="1600">
+                <a:latin typeface="Calibri"/>
+              </a:rPr>
               <a:t>Exercise 4 trains up to 9 models - may take 2-5 minutes total</a:t>
             </a:r>
           </a:p>
@@ -8694,37 +8742,49 @@
           <a:lstStyle/>
           <a:p>
             <a:r>
-              <a:rPr sz="1500"/>
+              <a:rPr sz="1500">
+                <a:latin typeface="Calibri"/>
+              </a:rPr>
               <a:t>Parameters are learned; hyperparameters are set by you before training</a:t>
             </a:r>
           </a:p>
           <a:p>
             <a:r>
-              <a:rPr sz="1500"/>
+              <a:rPr sz="1500">
+                <a:latin typeface="Calibri"/>
+              </a:rPr>
               <a:t>Learning rate is the most impactful - always tune it first (0.01/0.001/0.0001)</a:t>
             </a:r>
           </a:p>
           <a:p>
             <a:r>
-              <a:rPr sz="1500"/>
+              <a:rPr sz="1500">
+                <a:latin typeface="Calibri"/>
+              </a:rPr>
               <a:t>Start simple (small network) and add complexity only if underfitting</a:t>
             </a:r>
           </a:p>
           <a:p>
             <a:r>
-              <a:rPr sz="1500"/>
+              <a:rPr sz="1500">
+                <a:latin typeface="Calibri"/>
+              </a:rPr>
               <a:t>Use EarlyStopping instead of manually choosing epochs</a:t>
             </a:r>
           </a:p>
           <a:p>
             <a:r>
-              <a:rPr sz="1500"/>
+              <a:rPr sz="1500">
+                <a:latin typeface="Calibri"/>
+              </a:rPr>
               <a:t>Random search often beats grid search for 4+ hyperparameters</a:t>
             </a:r>
           </a:p>
           <a:p>
             <a:r>
-              <a:rPr sz="1500"/>
+              <a:rPr sz="1500">
+                <a:latin typeface="Calibri"/>
+              </a:rPr>
               <a:t>Next: Stage 4 - Generative AI (LLMs, APIs, and RAG)</a:t>
             </a:r>
           </a:p>
@@ -8746,11 +8806,17 @@
           <a:lstStyle/>
           <a:p>
             <a:r>
+              <a:rPr b="1">
+                <a:latin typeface="Calibri"/>
+              </a:rPr>
               <a:t>Key</a:t>
             </a:r>
           </a:p>
           <a:p>
             <a:r>
+              <a:rPr b="1">
+                <a:latin typeface="Calibri"/>
+              </a:rPr>
               <a:t>Takeaways</a:t>
             </a:r>
           </a:p>
@@ -8790,6 +8856,9 @@
           <a:lstStyle/>
           <a:p>
             <a:r>
+              <a:rPr>
+                <a:latin typeface="Calibri"/>
+              </a:rPr>
               <a:t>Next:  Stage 4 - Generative AI</a:t>
             </a:r>
           </a:p>
@@ -8811,6 +8880,9 @@
           <a:lstStyle/>
           <a:p>
             <a:r>
+              <a:rPr b="1">
+                <a:latin typeface="Calibri"/>
+              </a:rPr>
               <a:t>Hyperparameter Tuning</a:t>
             </a:r>
           </a:p>
@@ -8850,31 +8922,41 @@
           <a:lstStyle/>
           <a:p>
             <a:r>
-              <a:rPr sz="1600"/>
+              <a:rPr sz="1600">
+                <a:latin typeface="Calibri"/>
+              </a:rPr>
               <a:t>Parameters vs hyperparameters - what the model learns vs what you set</a:t>
             </a:r>
           </a:p>
           <a:p>
             <a:r>
-              <a:rPr sz="1600"/>
+              <a:rPr sz="1600">
+                <a:latin typeface="Calibri"/>
+              </a:rPr>
               <a:t>The five key hyperparameters</a:t>
             </a:r>
           </a:p>
           <a:p>
             <a:r>
-              <a:rPr sz="1600"/>
+              <a:rPr sz="1600">
+                <a:latin typeface="Calibri"/>
+              </a:rPr>
               <a:t>Learning rate sensitivity - the most impactful setting</a:t>
             </a:r>
           </a:p>
           <a:p>
             <a:r>
-              <a:rPr sz="1600"/>
+              <a:rPr sz="1600">
+                <a:latin typeface="Calibri"/>
+              </a:rPr>
               <a:t>Search strategies: manual, grid, random</a:t>
             </a:r>
           </a:p>
           <a:p>
             <a:r>
-              <a:rPr sz="1600"/>
+              <a:rPr sz="1600">
+                <a:latin typeface="Calibri"/>
+              </a:rPr>
               <a:t>Practical tuning workflow</a:t>
             </a:r>
           </a:p>
@@ -8896,6 +8978,9 @@
           <a:lstStyle/>
           <a:p>
             <a:r>
+              <a:rPr b="1">
+                <a:latin typeface="Calibri"/>
+              </a:rPr>
               <a:t>What We'll Cover</a:t>
             </a:r>
           </a:p>
@@ -8935,11 +9020,17 @@
           <a:lstStyle/>
           <a:p>
             <a:r>
+              <a:rPr b="1">
+                <a:latin typeface="Calibri"/>
+              </a:rPr>
               <a:t>Parameters vs</a:t>
             </a:r>
           </a:p>
           <a:p>
             <a:r>
+              <a:rPr b="1">
+                <a:latin typeface="Calibri"/>
+              </a:rPr>
               <a:t>Hyperparameters</a:t>
             </a:r>
           </a:p>
@@ -8961,6 +9052,9 @@
           <a:lstStyle/>
           <a:p>
             <a:r>
+              <a:rPr b="1">
+                <a:latin typeface="Calibri"/>
+              </a:rPr>
               <a:t>01</a:t>
             </a:r>
           </a:p>
@@ -9000,6 +9094,9 @@
           <a:lstStyle/>
           <a:p>
             <a:r>
+              <a:rPr b="1">
+                <a:latin typeface="Calibri"/>
+              </a:rPr>
               <a:t>What the Model Learns vs What You Choose</a:t>
             </a:r>
           </a:p>
@@ -9021,49 +9118,65 @@
           <a:lstStyle/>
           <a:p>
             <a:r>
-              <a:rPr sz="1400"/>
+              <a:rPr sz="1400">
+                <a:latin typeface="Calibri"/>
+              </a:rPr>
               <a:t>Parameters (learned)</a:t>
             </a:r>
           </a:p>
           <a:p>
             <a:r>
-              <a:rPr sz="1400"/>
+              <a:rPr sz="1400">
+                <a:latin typeface="Calibri"/>
+              </a:rPr>
               <a:t/>
             </a:r>
           </a:p>
           <a:p>
             <a:r>
-              <a:rPr sz="1400"/>
+              <a:rPr sz="1400">
+                <a:latin typeface="Calibri"/>
+              </a:rPr>
               <a:t>Weights and biases</a:t>
             </a:r>
           </a:p>
           <a:p>
             <a:r>
-              <a:rPr sz="1400"/>
+              <a:rPr sz="1400">
+                <a:latin typeface="Calibri"/>
+              </a:rPr>
               <a:t>Adjusted during training</a:t>
             </a:r>
           </a:p>
           <a:p>
             <a:r>
-              <a:rPr sz="1400"/>
+              <a:rPr sz="1400">
+                <a:latin typeface="Calibri"/>
+              </a:rPr>
               <a:t>  via backpropagation</a:t>
             </a:r>
           </a:p>
           <a:p>
             <a:r>
-              <a:rPr sz="1400"/>
+              <a:rPr sz="1400">
+                <a:latin typeface="Calibri"/>
+              </a:rPr>
               <a:t/>
             </a:r>
           </a:p>
           <a:p>
             <a:r>
-              <a:rPr sz="1400"/>
+              <a:rPr sz="1400">
+                <a:latin typeface="Calibri"/>
+              </a:rPr>
               <a:t>You never set these</a:t>
             </a:r>
           </a:p>
           <a:p>
             <a:r>
-              <a:rPr sz="1400"/>
+              <a:rPr sz="1400">
+                <a:latin typeface="Calibri"/>
+              </a:rPr>
               <a:t>The model finds them</a:t>
             </a:r>
           </a:p>
@@ -9085,49 +9198,65 @@
           <a:lstStyle/>
           <a:p>
             <a:r>
-              <a:rPr sz="1400"/>
+              <a:rPr sz="1400">
+                <a:latin typeface="Calibri"/>
+              </a:rPr>
               <a:t>Hyperparameters (you set)</a:t>
             </a:r>
           </a:p>
           <a:p>
             <a:r>
-              <a:rPr sz="1400"/>
+              <a:rPr sz="1400">
+                <a:latin typeface="Calibri"/>
+              </a:rPr>
               <a:t/>
             </a:r>
           </a:p>
           <a:p>
             <a:r>
-              <a:rPr sz="1400"/>
+              <a:rPr sz="1400">
+                <a:latin typeface="Calibri"/>
+              </a:rPr>
               <a:t>Learning rate, batch size</a:t>
             </a:r>
           </a:p>
           <a:p>
             <a:r>
-              <a:rPr sz="1400"/>
+              <a:rPr sz="1400">
+                <a:latin typeface="Calibri"/>
+              </a:rPr>
               <a:t>Number of layers/neurons</a:t>
             </a:r>
           </a:p>
           <a:p>
             <a:r>
-              <a:rPr sz="1400"/>
+              <a:rPr sz="1400">
+                <a:latin typeface="Calibri"/>
+              </a:rPr>
               <a:t>Dropout rate, epochs</a:t>
             </a:r>
           </a:p>
           <a:p>
             <a:r>
-              <a:rPr sz="1400"/>
+              <a:rPr sz="1400">
+                <a:latin typeface="Calibri"/>
+              </a:rPr>
               <a:t/>
             </a:r>
           </a:p>
           <a:p>
             <a:r>
-              <a:rPr sz="1400"/>
+              <a:rPr sz="1400">
+                <a:latin typeface="Calibri"/>
+              </a:rPr>
               <a:t>You choose before training</a:t>
             </a:r>
           </a:p>
           <a:p>
             <a:r>
-              <a:rPr sz="1400"/>
+              <a:rPr sz="1400">
+                <a:latin typeface="Calibri"/>
+              </a:rPr>
               <a:t>Getting them right: 75% -&gt; 95%</a:t>
             </a:r>
           </a:p>
@@ -9167,11 +9296,17 @@
           <a:lstStyle/>
           <a:p>
             <a:r>
+              <a:rPr b="1">
+                <a:latin typeface="Calibri"/>
+              </a:rPr>
               <a:t>The Five Key</a:t>
             </a:r>
           </a:p>
           <a:p>
             <a:r>
+              <a:rPr b="1">
+                <a:latin typeface="Calibri"/>
+              </a:rPr>
               <a:t>Hyperparameters</a:t>
             </a:r>
           </a:p>
@@ -9193,6 +9328,9 @@
           <a:lstStyle/>
           <a:p>
             <a:r>
+              <a:rPr b="1">
+                <a:latin typeface="Calibri"/>
+              </a:rPr>
               <a:t>02</a:t>
             </a:r>
           </a:p>
@@ -9232,6 +9370,9 @@
           <a:lstStyle/>
           <a:p>
             <a:r>
+              <a:rPr b="1">
+                <a:latin typeface="Calibri"/>
+              </a:rPr>
               <a:t>Ranked by Impact on Model Performance</a:t>
             </a:r>
           </a:p>
@@ -9295,11 +9436,17 @@
           <a:lstStyle/>
           <a:p>
             <a:r>
+              <a:rPr b="1">
+                <a:latin typeface="Calibri"/>
+              </a:rPr>
               <a:t>Learning Rate</a:t>
             </a:r>
           </a:p>
           <a:p>
             <a:r>
+              <a:rPr b="1">
+                <a:latin typeface="Calibri"/>
+              </a:rPr>
               <a:t>Sensitivity</a:t>
             </a:r>
           </a:p>
@@ -9321,6 +9468,9 @@
           <a:lstStyle/>
           <a:p>
             <a:r>
+              <a:rPr b="1">
+                <a:latin typeface="Calibri"/>
+              </a:rPr>
               <a:t>03</a:t>
             </a:r>
           </a:p>
@@ -9360,6 +9510,9 @@
           <a:lstStyle/>
           <a:p>
             <a:r>
+              <a:rPr b="1">
+                <a:latin typeface="Calibri"/>
+              </a:rPr>
               <a:t>Too High, Just Right, Too Low</a:t>
             </a:r>
           </a:p>
@@ -9423,6 +9576,9 @@
           <a:lstStyle/>
           <a:p>
             <a:r>
+              <a:rPr>
+                <a:latin typeface="Calibri"/>
+              </a:rPr>
               <a:t/>
             </a:r>
           </a:p>
@@ -9444,25 +9600,33 @@
           <a:lstStyle/>
           <a:p>
             <a:r>
-              <a:rPr sz="1400"/>
+              <a:rPr sz="1400">
+                <a:latin typeface="Calibri"/>
+              </a:rPr>
               <a:t>Learning rate is the single</a:t>
             </a:r>
           </a:p>
           <a:p>
             <a:r>
-              <a:rPr sz="1400"/>
+              <a:rPr sz="1400">
+                <a:latin typeface="Calibri"/>
+              </a:rPr>
               <a:t>most impactful hyperparameter.</a:t>
             </a:r>
           </a:p>
           <a:p>
             <a:r>
-              <a:rPr sz="1400"/>
+              <a:rPr sz="1400">
+                <a:latin typeface="Calibri"/>
+              </a:rPr>
               <a:t/>
             </a:r>
           </a:p>
           <a:p>
             <a:r>
-              <a:rPr sz="1400"/>
+              <a:rPr sz="1400">
+                <a:latin typeface="Calibri"/>
+              </a:rPr>
               <a:t>Always tune it first.</a:t>
             </a:r>
           </a:p>
@@ -9484,6 +9648,9 @@
           <a:lstStyle/>
           <a:p>
             <a:r>
+              <a:rPr b="1">
+                <a:latin typeface="Calibri"/>
+              </a:rPr>
               <a:t>Finding the Right Learning Rate</a:t>
             </a:r>
           </a:p>
@@ -9505,55 +9672,73 @@
           <a:lstStyle/>
           <a:p>
             <a:r>
-              <a:rPr sz="1400"/>
+              <a:rPr sz="1400">
+                <a:latin typeface="Calibri"/>
+              </a:rPr>
               <a:t>Start with Adam default: 0.001</a:t>
             </a:r>
           </a:p>
           <a:p>
             <a:r>
-              <a:rPr sz="1400"/>
+              <a:rPr sz="1400">
+                <a:latin typeface="Calibri"/>
+              </a:rPr>
               <a:t/>
             </a:r>
           </a:p>
           <a:p>
             <a:r>
-              <a:rPr sz="1400"/>
+              <a:rPr sz="1400">
+                <a:latin typeface="Calibri"/>
+              </a:rPr>
               <a:t>Try three values: 0.01, 0.001, 0.0001</a:t>
             </a:r>
           </a:p>
           <a:p>
             <a:r>
-              <a:rPr sz="1400"/>
+              <a:rPr sz="1400">
+                <a:latin typeface="Calibri"/>
+              </a:rPr>
               <a:t>  Plot loss curves for each</a:t>
             </a:r>
           </a:p>
           <a:p>
             <a:r>
-              <a:rPr sz="1400"/>
+              <a:rPr sz="1400">
+                <a:latin typeface="Calibri"/>
+              </a:rPr>
               <a:t/>
             </a:r>
           </a:p>
           <a:p>
             <a:r>
-              <a:rPr sz="1400"/>
+              <a:rPr sz="1400">
+                <a:latin typeface="Calibri"/>
+              </a:rPr>
               <a:t>Signs of trouble:</a:t>
             </a:r>
           </a:p>
           <a:p>
             <a:r>
-              <a:rPr sz="1400"/>
+              <a:rPr sz="1400">
+                <a:latin typeface="Calibri"/>
+              </a:rPr>
               <a:t>  Oscillating loss = lr too high</a:t>
             </a:r>
           </a:p>
           <a:p>
             <a:r>
-              <a:rPr sz="1400"/>
+              <a:rPr sz="1400">
+                <a:latin typeface="Calibri"/>
+              </a:rPr>
               <a:t>  Barely moving loss = lr too low</a:t>
             </a:r>
           </a:p>
           <a:p>
             <a:r>
-              <a:rPr sz="1400"/>
+              <a:rPr sz="1400">
+                <a:latin typeface="Calibri"/>
+              </a:rPr>
               <a:t>  Smooth descent = just right</a:t>
             </a:r>
           </a:p>
